--- a/Lesson26-Evaluator/Lesson26-Evaluator.pptx
+++ b/Lesson26-Evaluator/Lesson26-Evaluator.pptx
@@ -776,7 +776,7 @@
           <a:p>
             <a:r>
               <a:rPr lang="en-US" dirty="0"/>
-              <a:t>Here is the shift. Until now, an agent answered a person and the person decided whether the answer was any good, by eye, one run at a time. In this lesson a second agent does that judging. It compares the first agent's answer with a known ground truth and applies an explicit rubric, so 'is this good?' becomes a repeatable, criteria-based check you can rerun whenever you change a prompt or a model. Nothing new is needed in the kernel: both agents share the same IChatCompletionService. What changes is the job we give the prompt.</a:t>
+              <a:t>Here is the shift. We've had one model review another before: the critic loops in Lessons 11 and 18 read a draft and sent feedback back for a rewrite. But nothing there produced a score, and there was no known-correct answer to compare against, so whether the final output was actually right was still judged by eye, one run at a time. This lesson is the first automated, scored test harness. A judge agent compares the first agent's answer with a known ground truth and applies an explicit rubric, so 'is this good?' becomes a repeatable, criteria-based check you can rerun whenever you change a prompt or a model. Nothing new is needed in the kernel: both agents share the same IChatCompletionService. What changes is the job we give the prompt.</a:t>
             </a:r>
             <a:endParaRPr lang="en-US" dirty="0"/>
           </a:p>
@@ -4285,7 +4285,7 @@
               <a:buNone/>
             </a:pPr>
             <a:r>
-              <a:rPr lang="en-US" sz="2800" b="1" dirty="0">
+              <a:rPr lang="en-US" sz="2750" b="1" dirty="0">
                 <a:solidFill>
                   <a:srgbClr val="1F2937"/>
                 </a:solidFill>
@@ -4293,9 +4293,9 @@
                 <a:ea typeface="Cambria" pitchFamily="34" charset="-122"/>
                 <a:cs typeface="Cambria" pitchFamily="34" charset="-120"/>
               </a:rPr>
-              <a:t>From talking to a user to grading an agent</a:t>
-            </a:r>
-            <a:endParaRPr lang="en-US" sz="2800" dirty="0"/>
+              <a:t>From critiquing a draft to scoring a test set</a:t>
+            </a:r>
+            <a:endParaRPr lang="en-US" sz="2750" dirty="0"/>
           </a:p>
         </p:txBody>
       </p:sp>
@@ -4451,7 +4451,7 @@
                 <a:ea typeface="Calibri" pitchFamily="34" charset="-122"/>
                 <a:cs typeface="Calibri" pitchFamily="34" charset="-120"/>
               </a:rPr>
-              <a:t>An agent answers a person</a:t>
+              <a:t>Critics review drafts (Lessons 11, 18)</a:t>
             </a:r>
             <a:endParaRPr lang="en-US" sz="1300" dirty="0"/>
           </a:p>
@@ -4472,7 +4472,7 @@
                 <a:ea typeface="Calibri" pitchFamily="34" charset="-122"/>
                 <a:cs typeface="Calibri" pitchFamily="34" charset="-120"/>
               </a:rPr>
-              <a:t>A human decides if the answer is good</a:t>
+              <a:t>Feedback drives a rewrite, not a score</a:t>
             </a:r>
             <a:endParaRPr lang="en-US" sz="1300" dirty="0"/>
           </a:p>
@@ -4493,7 +4493,7 @@
                 <a:ea typeface="Calibri" pitchFamily="34" charset="-122"/>
                 <a:cs typeface="Calibri" pitchFamily="34" charset="-120"/>
               </a:rPr>
-              <a:t>Quality is checked by eye, one run at a time</a:t>
+              <a:t>No known answers to check against</a:t>
             </a:r>
             <a:endParaRPr lang="en-US" sz="1300" dirty="0"/>
           </a:p>
